--- a/curso_es/pptx/S55.pptx
+++ b/curso_es/pptx/S55.pptx
@@ -3718,7 +3718,7 @@
                 </a:solidFill>
                 <a:latin typeface="Fredoka"/>
               </a:rPr>
-              <a:t>Caso 1 · Kevin y su youtuber</a:t>
+              <a:t>Caso 1 · Un chico y su youtuber</a:t>
             </a:r>
           </a:p>
         </p:txBody>
@@ -3800,7 +3800,7 @@
                 </a:solidFill>
                 <a:latin typeface="Nunito Sans"/>
               </a:rPr>
-              <a:t>Kevin opina igual que su youtuber favorito sobre todo: música, política, videojuegos, comida. Cuando le preguntan por qué, dice: «Lo dijo él».</a:t>
+              <a:t>Un chico opina igual que su youtuber favorito sobre todo: música, política, videojuegos, comida. Cuando le preguntan por qué, dice: «Lo dijo él».</a:t>
             </a:r>
           </a:p>
         </p:txBody>
@@ -3923,7 +3923,7 @@
                 </a:solidFill>
                 <a:latin typeface="Nunito Sans"/>
               </a:rPr>
-              <a:t>Conclusión: en eso Kevin no piensa por sí mismo. Otro decide por él: heteronomía.</a:t>
+              <a:t>Conclusión: en eso ese chico no piensa por sí mismo. Otro decide por él: heteronomía.</a:t>
             </a:r>
           </a:p>
         </p:txBody>
@@ -4027,7 +4027,7 @@
                 </a:solidFill>
                 <a:latin typeface="Fredoka"/>
               </a:rPr>
-              <a:t>Caso 2 · Maialen y la médica</a:t>
+              <a:t>Caso 2 · Una chica y la médica</a:t>
             </a:r>
           </a:p>
         </p:txBody>
@@ -4109,7 +4109,7 @@
                 </a:solidFill>
                 <a:latin typeface="Nunito Sans"/>
               </a:rPr>
-              <a:t>Maialen tiene tos. Su médica le receta un jarabe y Maialen se lo toma. ¿Ha dejado de pensar por sí misma?</a:t>
+              <a:t>Una chica tiene tos. Su médica le receta un jarabe y se lo toma. ¿Ha dejado de pensar por sí misma?</a:t>
             </a:r>
           </a:p>
         </p:txBody>
@@ -4157,7 +4157,7 @@
                 </a:solidFill>
                 <a:latin typeface="Nunito Sans"/>
               </a:rPr>
-              <a:t>Maialen no sabe de medicina; la médica sí (sesión 26).</a:t>
+              <a:t>Esa chica no sabe de medicina; la médica sí (sesión 26).</a:t>
             </a:r>
           </a:p>
           <a:p>
@@ -4418,7 +4418,7 @@
                 </a:solidFill>
                 <a:latin typeface="Nunito Sans"/>
               </a:rPr>
-              <a:t>Omar sigue a un youtuber de ciencia. Busca otras fuentes, compara razones… y casi siempre acaba pensando lo mismo que él.</a:t>
+              <a:t>Un chico sigue a un youtuber de ciencia. Busca otras fuentes, compara razones… y casi siempre acaba pensando lo mismo que él.</a:t>
             </a:r>
           </a:p>
         </p:txBody>
@@ -4466,7 +4466,7 @@
                 </a:solidFill>
                 <a:latin typeface="Nunito Sans"/>
               </a:rPr>
-              <a:t>Piensa igual que su youtuber, como Kevin. ¿Tampoco es autónomo?</a:t>
+              <a:t>Piensa igual que su youtuber, como en el primer caso. ¿Tampoco es autónomo?</a:t>
             </a:r>
           </a:p>
           <a:p>
@@ -4491,7 +4491,7 @@
                 </a:solidFill>
                 <a:latin typeface="Nunito Sans"/>
               </a:rPr>
-              <a:t>Parece lo mismo que Kevin: las mismas opiniones que su youtuber.</a:t>
+              <a:t>Parece lo mismo que antes: las mismas opiniones que su youtuber.</a:t>
             </a:r>
           </a:p>
           <a:p>
@@ -4516,7 +4516,7 @@
                 </a:solidFill>
                 <a:latin typeface="Nunito Sans"/>
               </a:rPr>
-              <a:t>Pero Omar compara fuentes y puede explicar sus razones. Si no le convencen, discrepa.</a:t>
+              <a:t>Pero este chico compara fuentes y puede explicar sus razones. Si no le convencen, discrepa.</a:t>
             </a:r>
           </a:p>
           <a:p>
@@ -6496,7 +6496,7 @@
                 </a:solidFill>
                 <a:latin typeface="Nunito Sans"/>
               </a:rPr>
-              <a:t>Kevin se ha cortado el pelo como su youtuber favorito, usa sus frases y opina igual que él sobre todo.</a:t>
+              <a:t>Un chico se ha cortado el pelo como su youtuber favorito, usa sus frases y opina igual que él sobre todo.</a:t>
             </a:r>
           </a:p>
         </p:txBody>
@@ -6535,7 +6535,7 @@
                 </a:solidFill>
                 <a:latin typeface="Nunito Sans"/>
               </a:rPr>
-              <a:t>¿Kevin piensa por sí mismo? ¿Cómo lo sabrías?</a:t>
+              <a:t>¿Ese chico piensa por sí mismo? ¿Cómo lo sabrías?</a:t>
             </a:r>
           </a:p>
         </p:txBody>
